--- a/exports/quarto/pptx/CANON_POINTER.pptx
+++ b/exports/quarto/pptx/CANON_POINTER.pptx
@@ -3174,7 +3174,7 @@
             </a:pPr>
             <a:r>
               <a:rPr/>
-              <a:t>April 9, 2026</a:t>
+              <a:t>April 10, 2026</a:t>
             </a:r>
           </a:p>
         </p:txBody>

--- a/exports/quarto/pptx/CANON_POINTER.pptx
+++ b/exports/quarto/pptx/CANON_POINTER.pptx
@@ -3174,7 +3174,7 @@
             </a:pPr>
             <a:r>
               <a:rPr/>
-              <a:t>April 10, 2026</a:t>
+              <a:t>April 11, 2026</a:t>
             </a:r>
           </a:p>
         </p:txBody>

--- a/exports/quarto/pptx/CANON_POINTER.pptx
+++ b/exports/quarto/pptx/CANON_POINTER.pptx
@@ -3174,7 +3174,7 @@
             </a:pPr>
             <a:r>
               <a:rPr/>
-              <a:t>April 11, 2026</a:t>
+              <a:t>April 13, 2026</a:t>
             </a:r>
           </a:p>
         </p:txBody>

--- a/exports/quarto/pptx/CANON_POINTER.pptx
+++ b/exports/quarto/pptx/CANON_POINTER.pptx
@@ -3174,7 +3174,7 @@
             </a:pPr>
             <a:r>
               <a:rPr/>
-              <a:t>April 13, 2026</a:t>
+              <a:t>April 14, 2026</a:t>
             </a:r>
           </a:p>
         </p:txBody>
